--- a/apps/resources/bundled_files/1-klass-koshuu-1234-v4.pptx
+++ b/apps/resources/bundled_files/1-klass-koshuu-1234-v4.pptx
@@ -4057,7 +4057,7 @@
                 </a:solidFill>
                 <a:latin typeface="PT Sans"/>
               </a:rPr>
-              <a:t>1-класс › 10 ичинде кошуу</a:t>
+              <a:t>10 ичинде кошуу</a:t>
             </a:r>
           </a:p>
           <a:p>
@@ -4910,7 +4910,7 @@
                 </a:solidFill>
                 <a:latin typeface="PT Sans"/>
               </a:rPr>
-              <a:t>1-класс › 10 ичинде кошуу</a:t>
+              <a:t>10 ичинде кошуу</a:t>
             </a:r>
           </a:p>
           <a:p>
@@ -6228,7 +6228,7 @@
                 </a:solidFill>
                 <a:latin typeface="PT Sans"/>
               </a:rPr>
-              <a:t>1-класс › 10 ичинде кошуу</a:t>
+              <a:t>10 ичинде кошуу</a:t>
             </a:r>
           </a:p>
           <a:p>
@@ -10935,7 +10935,7 @@
                 </a:solidFill>
                 <a:latin typeface="PT Sans"/>
               </a:rPr>
-              <a:t>1-класс › 10 ичинде кошуу</a:t>
+              <a:t>10 ичинде кошуу</a:t>
             </a:r>
           </a:p>
           <a:p>
@@ -12253,7 +12253,7 @@
                 </a:solidFill>
                 <a:latin typeface="PT Sans"/>
               </a:rPr>
-              <a:t>1-класс › 10 ичинде кошуу</a:t>
+              <a:t>10 ичинде кошуу</a:t>
             </a:r>
           </a:p>
           <a:p>
